--- a/reports/slides/Week6_3MT_slides.pptx
+++ b/reports/slides/Week6_3MT_slides.pptx
@@ -3394,7 +3394,7 @@
                 </a:solidFill>
                 <a:latin typeface="Calibri"/>
               </a:rPr>
-              <a:t>Squeezing the model costs the same — however messy the data</a:t>
+              <a:t>Squeezing the model costs no more when the data gets messy</a:t>
             </a:r>
           </a:p>
         </p:txBody>

--- a/reports/slides/Week6_3MT_slides.pptx
+++ b/reports/slides/Week6_3MT_slides.pptx
@@ -3305,7 +3305,7 @@
                 </a:solidFill>
                 <a:latin typeface="Calibri"/>
               </a:rPr>
-              <a:t>[Your Name]</a:t>
+              <a:t>Jeonghun Kim</a:t>
             </a:r>
           </a:p>
           <a:p>
